--- a/JournalEvent2Slides.pptx
+++ b/JournalEvent2Slides.pptx
@@ -8032,7 +8032,7 @@
                   <a:srgbClr val="CFA6FC"/>
                 </a:solidFill>
               </a:rPr>
-              <a:t>23/04/2026 Fulton 102 17:00</a:t>
+              <a:t>07/05/2026 Fulton 102 17:00</a:t>
             </a:r>
             <a:endParaRPr lang="en-US" sz="2800" b="0" dirty="0">
               <a:solidFill>

--- a/JournalEvent2Slides.pptx
+++ b/JournalEvent2Slides.pptx
@@ -5,10 +5,10 @@
     <p:sldMasterId id="2147483648" r:id="rId4"/>
   </p:sldMasterIdLst>
   <p:notesMasterIdLst>
-    <p:notesMasterId r:id="rId11"/>
+    <p:notesMasterId r:id="rId12"/>
   </p:notesMasterIdLst>
   <p:handoutMasterIdLst>
-    <p:handoutMasterId r:id="rId12"/>
+    <p:handoutMasterId r:id="rId13"/>
   </p:handoutMasterIdLst>
   <p:sldIdLst>
     <p:sldId id="340" r:id="rId5"/>
@@ -17,6 +17,7 @@
     <p:sldId id="357" r:id="rId8"/>
     <p:sldId id="358" r:id="rId9"/>
     <p:sldId id="359" r:id="rId10"/>
+    <p:sldId id="360" r:id="rId11"/>
   </p:sldIdLst>
   <p:sldSz cx="12192000" cy="6858000"/>
   <p:notesSz cx="6858000" cy="9144000"/>
@@ -8309,7 +8310,7 @@
         </p:nvSpPr>
         <p:spPr>
           <a:xfrm>
-            <a:off x="809999" y="4140417"/>
+            <a:off x="809999" y="4847988"/>
             <a:ext cx="10572000" cy="896468"/>
           </a:xfrm>
         </p:spPr>
@@ -8425,7 +8426,12 @@
             <p:ph type="subTitle" idx="1"/>
           </p:nvPr>
         </p:nvSpPr>
-        <p:spPr/>
+        <p:spPr>
+          <a:xfrm>
+            <a:off x="810000" y="5033045"/>
+            <a:ext cx="10572000" cy="896468"/>
+          </a:xfrm>
+        </p:spPr>
         <p:txBody>
           <a:bodyPr/>
           <a:lstStyle/>
@@ -8678,6 +8684,143 @@
     <p:extLst>
       <p:ext uri="{BB962C8B-B14F-4D97-AF65-F5344CB8AC3E}">
         <p14:creationId xmlns:p14="http://schemas.microsoft.com/office/powerpoint/2010/main" val="379053094"/>
+      </p:ext>
+    </p:extLst>
+  </p:cSld>
+  <p:clrMapOvr>
+    <a:masterClrMapping/>
+  </p:clrMapOvr>
+</p:sld>
+</file>
+
+<file path=ppt/slides/slide7.xml><?xml version="1.0" encoding="utf-8"?>
+<p:sld xmlns:a="http://schemas.openxmlformats.org/drawingml/2006/main" xmlns:r="http://schemas.openxmlformats.org/officeDocument/2006/relationships" xmlns:p="http://schemas.openxmlformats.org/presentationml/2006/main">
+  <p:cSld>
+    <p:bg>
+      <p:bgPr>
+        <a:solidFill>
+          <a:srgbClr val="CFA6FC"/>
+        </a:solidFill>
+        <a:effectLst/>
+      </p:bgPr>
+    </p:bg>
+    <p:spTree>
+      <p:nvGrpSpPr>
+        <p:cNvPr id="1" name=""/>
+        <p:cNvGrpSpPr/>
+        <p:nvPr/>
+      </p:nvGrpSpPr>
+      <p:grpSpPr>
+        <a:xfrm>
+          <a:off x="0" y="0"/>
+          <a:ext cx="0" cy="0"/>
+          <a:chOff x="0" y="0"/>
+          <a:chExt cx="0" cy="0"/>
+        </a:xfrm>
+      </p:grpSpPr>
+      <p:sp>
+        <p:nvSpPr>
+          <p:cNvPr id="2" name="Title 1">
+            <a:extLst>
+              <a:ext uri="{FF2B5EF4-FFF2-40B4-BE49-F238E27FC236}">
+                <a16:creationId xmlns:a16="http://schemas.microsoft.com/office/drawing/2014/main" id="{ECEF263C-4332-8C81-71EB-E1CD2B50634F}"/>
+              </a:ext>
+            </a:extLst>
+          </p:cNvPr>
+          <p:cNvSpPr>
+            <a:spLocks noGrp="1"/>
+          </p:cNvSpPr>
+          <p:nvPr>
+            <p:ph type="title"/>
+          </p:nvPr>
+        </p:nvSpPr>
+        <p:spPr>
+          <a:xfrm>
+            <a:off x="810001" y="3429000"/>
+            <a:ext cx="10571998" cy="1928264"/>
+          </a:xfrm>
+        </p:spPr>
+        <p:txBody>
+          <a:bodyPr/>
+          <a:lstStyle/>
+          <a:p>
+            <a:r>
+              <a:rPr lang="en-GB" sz="2000" dirty="0">
+                <a:solidFill>
+                  <a:srgbClr val="CFA6FC"/>
+                </a:solidFill>
+              </a:rPr>
+              <a:t>‘I am happy that this paper utilizes Shannon entropy! But, I remain </a:t>
+            </a:r>
+            <a:r>
+              <a:rPr lang="en-GB" sz="2000" dirty="0" err="1">
+                <a:solidFill>
+                  <a:srgbClr val="CFA6FC"/>
+                </a:solidFill>
+              </a:rPr>
+              <a:t>skeptical</a:t>
+            </a:r>
+            <a:r>
+              <a:rPr lang="en-GB" sz="2000" dirty="0">
+                <a:solidFill>
+                  <a:srgbClr val="CFA6FC"/>
+                </a:solidFill>
+              </a:rPr>
+              <a:t> about many things: primarily, using any sort of complexity measure in general, but ESPECIALLY trying to ignore differences in neurological tone drive via propofol and how these changes in global or lateralized resonance may give rise to the network specificities they found; general concerns surrounding things like BOLD and metabolic differences throughout the brain; and I guess, really, just this idea that we can tease apart experiential complexity in this manner. It is nice that they didn't rely on retrospective self-report as an index of "happened experiences", but I am sure a clip of audio from a suspenseful film comes with an ENORMOUS amount of cross-structural and trans-hierarchical confounds that a 5-minute 3-Tesla scanner simply cannot handle, and the idea of brining Shannon entropy into that mess is just hilarious to me that they found cool results! 🫠’ – Danny </a:t>
+            </a:r>
+            <a:r>
+              <a:rPr lang="en-GB" sz="2000" dirty="0" err="1">
+                <a:solidFill>
+                  <a:srgbClr val="CFA6FC"/>
+                </a:solidFill>
+              </a:rPr>
+              <a:t>Nacker</a:t>
+            </a:r>
+            <a:r>
+              <a:rPr lang="en-GB" sz="2000" dirty="0">
+                <a:solidFill>
+                  <a:srgbClr val="CFA6FC"/>
+                </a:solidFill>
+              </a:rPr>
+              <a:t>, SCCS</a:t>
+            </a:r>
+          </a:p>
+        </p:txBody>
+      </p:sp>
+      <p:sp>
+        <p:nvSpPr>
+          <p:cNvPr id="3" name="Subtitle 2">
+            <a:extLst>
+              <a:ext uri="{FF2B5EF4-FFF2-40B4-BE49-F238E27FC236}">
+                <a16:creationId xmlns:a16="http://schemas.microsoft.com/office/drawing/2014/main" id="{C617FFC0-0176-99FF-4A9A-AF471A341494}"/>
+              </a:ext>
+            </a:extLst>
+          </p:cNvPr>
+          <p:cNvSpPr>
+            <a:spLocks noGrp="1"/>
+          </p:cNvSpPr>
+          <p:nvPr>
+            <p:ph type="subTitle" idx="1"/>
+          </p:nvPr>
+        </p:nvSpPr>
+        <p:spPr>
+          <a:xfrm>
+            <a:off x="809999" y="5566445"/>
+            <a:ext cx="10572000" cy="896468"/>
+          </a:xfrm>
+        </p:spPr>
+        <p:txBody>
+          <a:bodyPr/>
+          <a:lstStyle/>
+          <a:p>
+            <a:endParaRPr lang="en-GB"/>
+          </a:p>
+        </p:txBody>
+      </p:sp>
+    </p:spTree>
+    <p:extLst>
+      <p:ext uri="{BB962C8B-B14F-4D97-AF65-F5344CB8AC3E}">
+        <p14:creationId xmlns:p14="http://schemas.microsoft.com/office/powerpoint/2010/main" val="2054885454"/>
       </p:ext>
     </p:extLst>
   </p:cSld>
